--- a/Fase 2/Presentacion-Cosmopolitan.pptx
+++ b/Fase 2/Presentacion-Cosmopolitan.pptx
@@ -1273,7 +1273,7 @@
                   <a:srgbClr val="241F2B"/>
                 </a:solidFill>
               </a:rPr>
-              <a:t>Sprint 2 · 57 pts (en curso)</a:t>
+              <a:t>Sprint 2 · 65 pts (en curso)</a:t>
             </a:r>
           </a:p>
         </c:rich>
@@ -1368,46 +1368,46 @@
                 <c:formatCode>General</c:formatCode>
                 <c:ptCount val="14"/>
                 <c:pt idx="0">
-                  <c:v>57</c:v>
+                  <c:v>65.0</c:v>
                 </c:pt>
                 <c:pt idx="1">
-                  <c:v>52.6</c:v>
+                  <c:v>60.0</c:v>
                 </c:pt>
                 <c:pt idx="2">
-                  <c:v>48.2</c:v>
+                  <c:v>55.0</c:v>
                 </c:pt>
                 <c:pt idx="3">
-                  <c:v>43.8</c:v>
+                  <c:v>50.0</c:v>
                 </c:pt>
                 <c:pt idx="4">
-                  <c:v>39.5</c:v>
+                  <c:v>45.0</c:v>
                 </c:pt>
                 <c:pt idx="5">
-                  <c:v>35.1</c:v>
+                  <c:v>40.0</c:v>
                 </c:pt>
                 <c:pt idx="6">
-                  <c:v>30.7</c:v>
+                  <c:v>35.0</c:v>
                 </c:pt>
                 <c:pt idx="7">
-                  <c:v>26.3</c:v>
+                  <c:v>30.0</c:v>
                 </c:pt>
                 <c:pt idx="8">
-                  <c:v>21.9</c:v>
+                  <c:v>25.0</c:v>
                 </c:pt>
                 <c:pt idx="9">
-                  <c:v>17.5</c:v>
+                  <c:v>20.0</c:v>
                 </c:pt>
                 <c:pt idx="10">
-                  <c:v>13.2</c:v>
+                  <c:v>15.0</c:v>
                 </c:pt>
                 <c:pt idx="11">
-                  <c:v>8.8000000000000007</c:v>
+                  <c:v>10.0</c:v>
                 </c:pt>
                 <c:pt idx="12">
-                  <c:v>4.4000000000000004</c:v>
+                  <c:v>5.0</c:v>
                 </c:pt>
                 <c:pt idx="13">
-                  <c:v>0</c:v>
+                  <c:v>0.0</c:v>
                 </c:pt>
               </c:numCache>
             </c:numRef>
@@ -1500,7 +1500,22 @@
                 <c:formatCode>General</c:formatCode>
                 <c:ptCount val="14"/>
                 <c:pt idx="0">
-                  <c:v>50</c:v>
+                  <c:v>58</c:v>
+                </c:pt>
+                <c:pt idx="1">
+                  <c:v>58</c:v>
+                </c:pt>
+                <c:pt idx="2">
+                  <c:v>58</c:v>
+                </c:pt>
+                <c:pt idx="3">
+                  <c:v>58</c:v>
+                </c:pt>
+                <c:pt idx="4">
+                  <c:v>58</c:v>
+                </c:pt>
+                <c:pt idx="5">
+                  <c:v>58</c:v>
                 </c:pt>
               </c:numCache>
             </c:numRef>
@@ -17864,7 +17879,7 @@
             </a:avLst>
           </a:prstGeom>
           <a:solidFill>
-            <a:srgbClr val="D97A44"/>
+            <a:srgbClr val="1D8F73"/>
           </a:solidFill>
           <a:ln>
             <a:noFill/>
@@ -19056,7 +19071,7 @@
             <a:avLst/>
           </a:prstGeom>
           <a:solidFill>
-            <a:srgbClr val="D97A44"/>
+            <a:srgbClr val="1D8F73"/>
           </a:solidFill>
           <a:ln>
             <a:noFill/>
@@ -19183,7 +19198,7 @@
                 <a:cs typeface="Calibri"/>
                 <a:sym typeface="Calibri"/>
               </a:rPr>
-              <a:t>API aún no configurada</a:t>
+              <a:t>Conectada (Google AI Studio)</a:t>
             </a:r>
             <a:endParaRPr/>
           </a:p>
@@ -25801,7 +25816,7 @@
                 <a:cs typeface="Poppins"/>
                 <a:sym typeface="Poppins"/>
               </a:rPr>
-              <a:t>7 / 57 pts en Hecho</a:t>
+              <a:t>7 / 65 pts en Hecho</a:t>
             </a:r>
             <a:endParaRPr/>
           </a:p>
@@ -25851,7 +25866,7 @@
                 <a:cs typeface="Calibri"/>
                 <a:sym typeface="Calibri"/>
               </a:rPr>
-              <a:t>Al 5 oct: 2 en Hecho, 2 en revisión, 5 por validar</a:t>
+              <a:t>Al 13 oct: 2 en Hecho, 2 en revisión, 6 por validar</a:t>
             </a:r>
             <a:endParaRPr/>
           </a:p>
@@ -25937,7 +25952,7 @@
                 <a:cs typeface="Calibri"/>
                 <a:sym typeface="Calibri"/>
               </a:rPr>
-              <a:t>El Sprint 2 sigue abierto: sus cifras son el corte del 5 de octubre y se actualizan en la Sprint Review.</a:t>
+              <a:t>El Sprint 2 sigue abierto: sus cifras son el corte del 13 de octubre y se actualizan en la Sprint Review.</a:t>
             </a:r>
             <a:endParaRPr/>
           </a:p>
@@ -28319,7 +28334,7 @@
                 <a:cs typeface="Calibri"/>
                 <a:sym typeface="Calibri"/>
               </a:rPr>
-              <a:t>SPRINT 2 · 7 de 57 pts (corte 5 oct)</a:t>
+              <a:t>SPRINT 2 · 7 de 65 pts (corte 13 oct)</a:t>
             </a:r>
             <a:endParaRPr/>
           </a:p>
@@ -29485,6 +29500,118 @@
                   </a:ext>
                 </a:extLst>
               </a:tr>
+              <a:tr h="301750">
+                <a:tc>
+                  <a:txBody>
+                    <a:bodyPr/>
+                    <a:lstStyle/>
+                    <a:p>
+                      <a:pPr marL="0" marR="0" lvl="0" indent="0" algn="l" rtl="0">
+                        <a:spcBef>
+                          <a:spcPts val="0"/>
+                        </a:spcBef>
+                        <a:spcAft>
+                          <a:spcPts val="0"/>
+                        </a:spcAft>
+                        <a:buNone/>
+                      </a:pPr>
+                      <a:r>
+                        <a:rPr lang="en-US" sz="900" b="0">
+                          <a:solidFill>
+                            <a:srgbClr val="241F2B"/>
+                          </a:solidFill>
+                          <a:latin typeface="Calibri"/>
+                          <a:ea typeface="Calibri"/>
+                          <a:cs typeface="Calibri"/>
+                          <a:sym typeface="Calibri"/>
+                        </a:rPr>
+                        <a:t>IA-01 Diagnóstico de cotización con IA</a:t>
+                      </a:r>
+                      <a:endParaRPr/>
+                    </a:p>
+                  </a:txBody>
+                  <a:tcPr marL="64000" marR="64000" marT="22850" marB="22850" anchor="ctr">
+                    <a:solidFill>
+                      <a:srgbClr val="F7F4F6"/>
+                    </a:solidFill>
+                  </a:tcPr>
+                </a:tc>
+                <a:tc>
+                  <a:txBody>
+                    <a:bodyPr/>
+                    <a:lstStyle/>
+                    <a:p>
+                      <a:pPr marL="0" marR="0" lvl="0" indent="0" algn="l" rtl="0">
+                        <a:spcBef>
+                          <a:spcPts val="0"/>
+                        </a:spcBef>
+                        <a:spcAft>
+                          <a:spcPts val="0"/>
+                        </a:spcAft>
+                        <a:buNone/>
+                      </a:pPr>
+                      <a:r>
+                        <a:rPr lang="en-US" sz="900" b="0">
+                          <a:solidFill>
+                            <a:srgbClr val="241F2B"/>
+                          </a:solidFill>
+                          <a:latin typeface="Calibri"/>
+                          <a:ea typeface="Calibri"/>
+                          <a:cs typeface="Calibri"/>
+                          <a:sym typeface="Calibri"/>
+                        </a:rPr>
+                        <a:t>8</a:t>
+                      </a:r>
+                      <a:endParaRPr/>
+                    </a:p>
+                  </a:txBody>
+                  <a:tcPr marL="64000" marR="64000" marT="22850" marB="22850" anchor="ctr">
+                    <a:solidFill>
+                      <a:srgbClr val="F7F4F6"/>
+                    </a:solidFill>
+                  </a:tcPr>
+                </a:tc>
+                <a:tc>
+                  <a:txBody>
+                    <a:bodyPr/>
+                    <a:lstStyle/>
+                    <a:p>
+                      <a:pPr marL="0" marR="0" lvl="0" indent="0" algn="l" rtl="0">
+                        <a:spcBef>
+                          <a:spcPts val="0"/>
+                        </a:spcBef>
+                        <a:spcAft>
+                          <a:spcPts val="0"/>
+                        </a:spcAft>
+                        <a:buNone/>
+                      </a:pPr>
+                      <a:r>
+                        <a:rPr lang="en-US" sz="900" b="0">
+                          <a:solidFill>
+                            <a:srgbClr val="241F2B"/>
+                          </a:solidFill>
+                          <a:latin typeface="Calibri"/>
+                          <a:ea typeface="Calibri"/>
+                          <a:cs typeface="Calibri"/>
+                          <a:sym typeface="Calibri"/>
+                        </a:rPr>
+                        <a:t>Por hacer*</a:t>
+                      </a:r>
+                      <a:endParaRPr/>
+                    </a:p>
+                  </a:txBody>
+                  <a:tcPr marL="64000" marR="64000" marT="22850" marB="22850" anchor="ctr">
+                    <a:solidFill>
+                      <a:srgbClr val="F7F4F6"/>
+                    </a:solidFill>
+                  </a:tcPr>
+                </a:tc>
+                <a:extLst>
+                  <a:ext uri="{0D108BD9-81ED-4DB2-BD59-A6C34878D82A}">
+                    <a16:rowId xmlns:a16="http://schemas.microsoft.com/office/drawing/2014/main" val="10009"/>
+                  </a:ext>
+                </a:extLst>
+              </a:tr>
             </a:tbl>
           </a:graphicData>
         </a:graphic>
@@ -29497,8 +29624,8 @@
         </p:nvSpPr>
         <p:spPr>
           <a:xfrm>
-            <a:off x="8138160" y="5166360"/>
-            <a:ext cx="3383280" cy="914400"/>
+            <a:off x="8138160" y="5600000"/>
+            <a:ext cx="3383280" cy="700000"/>
           </a:xfrm>
           <a:prstGeom prst="rect">
             <a:avLst/>
@@ -29808,7 +29935,7 @@
                 <a:cs typeface="Calibri"/>
                 <a:sym typeface="Calibri"/>
               </a:rPr>
-              <a:t>Conteo de tarjetas por columna. S0 y S1 según sus planillas; S2 según Trello al 5 de octubre.</a:t>
+              <a:t>Conteo de tarjetas por columna. S0 y S1 según sus planillas; S2 según el Kanban Board al 13 de octubre.</a:t>
             </a:r>
             <a:endParaRPr/>
           </a:p>
@@ -31676,7 +31803,7 @@
                 <a:cs typeface="Calibri"/>
                 <a:sym typeface="Calibri"/>
               </a:rPr>
-              <a:t>5 oct · tablero Trello</a:t>
+              <a:t>13 oct · Kanban Board</a:t>
             </a:r>
             <a:endParaRPr/>
           </a:p>
@@ -31872,7 +31999,7 @@
                 <a:cs typeface="Poppins"/>
                 <a:sym typeface="Poppins"/>
               </a:rPr>
-              <a:t>18</a:t>
+              <a:t>17</a:t>
             </a:r>
             <a:endParaRPr/>
           </a:p>
@@ -32068,7 +32195,7 @@
                 <a:cs typeface="Poppins"/>
                 <a:sym typeface="Poppins"/>
               </a:rPr>
-              <a:t>0</a:t>
+              <a:t>2</a:t>
             </a:r>
             <a:endParaRPr/>
           </a:p>
@@ -32460,7 +32587,7 @@
                 <a:cs typeface="Poppins"/>
                 <a:sym typeface="Poppins"/>
               </a:rPr>
-              <a:t>2</a:t>
+              <a:t>4</a:t>
             </a:r>
             <a:endParaRPr/>
           </a:p>
@@ -34369,7 +34496,7 @@
                 <a:cs typeface="Calibri"/>
                 <a:sym typeface="Calibri"/>
               </a:rPr>
-              <a:t>Sprint 2: arrastra I-002 e I-004 (en monitoreo); aún sin impedimentos nuevos registrados al 5 de octubre.</a:t>
+              <a:t>Sprint 2: arrastra I-002 e I-004 (en monitoreo); aún sin impedimentos nuevos registrados al 11 de octubre.</a:t>
             </a:r>
             <a:endParaRPr/>
           </a:p>
@@ -34716,7 +34843,7 @@
                 <a:cs typeface="Calibri"/>
                 <a:sym typeface="Calibri"/>
               </a:rPr>
-              <a:t>Eje horizontal: día hábil del sprint. S0 terminó el día 15 (28 ago), 5 días antes del cierre. S1 cerró con 60 de 65 pts (los 5 restantes son PC-TEC-03, fuera de alcance). S2: día 1, 50 pts restantes.</a:t>
+              <a:t>Eje horizontal: día hábil del sprint. S0 terminó el día 15 (28 ago), 5 días antes del cierre. S1 cerró con 60 de 65 pts (los 5 restantes son PC-TEC-03, fuera de alcance). S2: día 6 (13 oct), 58 pts restantes de 65: se sumó PC-IA-01 (8 pts) y no se han quemado puntos desde el día 1.</a:t>
             </a:r>
             <a:endParaRPr/>
           </a:p>
@@ -37721,7 +37848,7 @@
                 <a:cs typeface="Poppins"/>
                 <a:sym typeface="Poppins"/>
               </a:rPr>
-              <a:t>Carta Gantt con el estado real al 5 de octubre</a:t>
+              <a:t>Carta Gantt con el estado real al 13 de octubre</a:t>
             </a:r>
             <a:endParaRPr/>
           </a:p>
@@ -40775,7 +40902,7 @@
         </p:nvCxnSpPr>
         <p:spPr>
           <a:xfrm>
-            <a:off x="6908800" y="2103120"/>
+            <a:off x="7454000" y="2103120"/>
             <a:ext cx="0" cy="3611880"/>
           </a:xfrm>
           <a:prstGeom prst="straightConnector1">
@@ -40808,7 +40935,7 @@
         </p:nvSpPr>
         <p:spPr>
           <a:xfrm>
-            <a:off x="6360160" y="5742432"/>
+            <a:off x="6905360" y="5742432"/>
             <a:ext cx="1097280" cy="228600"/>
           </a:xfrm>
           <a:prstGeom prst="rect">
@@ -40844,7 +40971,7 @@
                 <a:cs typeface="Calibri"/>
                 <a:sym typeface="Calibri"/>
               </a:rPr>
-              <a:t>Hoy · 5 oct (S9)</a:t>
+              <a:t>Hoy · 13 oct (S10)</a:t>
             </a:r>
             <a:endParaRPr/>
           </a:p>
@@ -42958,7 +43085,7 @@
                 <a:cs typeface="Calibri"/>
                 <a:sym typeface="Calibri"/>
               </a:rPr>
-              <a:t>prospectos, cotizador, conversión, ficha del cliente y aislamiento ya tienen avance; 7 de 57 pts en Hecho al 5 oct.</a:t>
+              <a:t>prospectos, cotizador, conversión, ficha del cliente y aislamiento ya tienen avance; 7 de 65 pts en Hecho al 13 oct.</a:t>
             </a:r>
             <a:endParaRPr/>
           </a:p>
@@ -42994,7 +43121,7 @@
                 <a:cs typeface="Calibri"/>
                 <a:sym typeface="Calibri"/>
               </a:rPr>
-              <a:t>solución central de seguridad, cubierta por 140 pruebas automáticas en verde.</a:t>
+              <a:t>solución central de seguridad, cubierta por pruebas automáticas en verde.</a:t>
             </a:r>
             <a:endParaRPr/>
           </a:p>
@@ -43298,7 +43425,7 @@
                 <a:cs typeface="Calibri"/>
                 <a:sym typeface="Calibri"/>
               </a:rPr>
-              <a:t>métricas y las tres funciones de IA (configurar Gemini).</a:t>
+              <a:t>métricas y las demás funciones de IA (la conexión con Gemini ya está hecha).</a:t>
             </a:r>
             <a:endParaRPr/>
           </a:p>
